--- a/docs/ahg-2026/kit/examples/sam-remediation-log-keeper.pptx
+++ b/docs/ahg-2026/kit/examples/sam-remediation-log-keeper.pptx
@@ -29,6 +29,7 @@
     <p:sldId id="277" r:id="rId28"/>
     <p:sldId id="278" r:id="rId29"/>
     <p:sldId id="279" r:id="rId30"/>
+    <p:sldId id="280" r:id="rId31"/>
   </p:sldIdLst>
   <p:sldSz cx="12191695" cy="6858000" type="screen4x3"/>
   <p:notesSz cx="6858000" cy="9144000"/>
@@ -5313,7 +5314,7 @@
               <a:rPr sz="2000" b="0" lang="en-US">
                 <a:latin typeface="Arial"/>
               </a:rPr>
-              <a:t>Sam Okafor is the IT accessibility coordinator at Mesa Ridge State University. Sam reports to the CIO, who asked one question after the Title II deadline passed: "Where are we, and can we prove it?" Sam has a spreadsheet named </a:t>
+              <a:t>Sam Okafor is the IT accessibility coordinator at Mesa Ridge State University. Sam reports to the CIO, who asked one question when the Title II web rule was published: "Where are we, and can we prove it?" Sam has a spreadsheet named </a:t>
             </a:r>
             <a:r>
               <a:rPr sz="2000" b="0" lang="en-US">
@@ -6017,6 +6018,128 @@
 </p:sld>
 </file>
 
+<file path=ppt/slides/slide25.xml><?xml version="1.0" encoding="utf-8"?>
+<p:sld xmlns:a="http://schemas.openxmlformats.org/drawingml/2006/main" xmlns:p="http://schemas.openxmlformats.org/presentationml/2006/main" xmlns:r="http://schemas.openxmlformats.org/officeDocument/2006/relationships">
+  <p:cSld>
+    <p:spTree>
+      <p:nvGrpSpPr>
+        <p:cNvPr id="1" name=""/>
+        <p:cNvGrpSpPr/>
+        <p:nvPr/>
+      </p:nvGrpSpPr>
+      <p:grpSpPr/>
+      <p:sp>
+        <p:nvSpPr>
+          <p:cNvPr id="2" name="Title 1"/>
+          <p:cNvSpPr>
+            <a:spLocks noGrp="1"/>
+          </p:cNvSpPr>
+          <p:nvPr>
+            <p:ph type="title"/>
+          </p:nvPr>
+        </p:nvSpPr>
+        <p:spPr>
+          <a:xfrm>
+            <a:off x="548640" y="365760"/>
+            <a:ext cx="11064240" cy="1097280"/>
+          </a:xfrm>
+        </p:spPr>
+        <p:txBody>
+          <a:bodyPr wrap="square"/>
+          <a:lstStyle/>
+          <a:p>
+            <a:r>
+              <a:rPr sz="3600" b="1" lang="en-US">
+                <a:latin typeface="Arial"/>
+              </a:rPr>
+              <a:t>Sources</a:t>
+            </a:r>
+          </a:p>
+        </p:txBody>
+      </p:sp>
+      <p:sp>
+        <p:nvSpPr>
+          <p:cNvPr id="3" name="Content Placeholder 2"/>
+          <p:cNvSpPr>
+            <a:spLocks noGrp="1"/>
+          </p:cNvSpPr>
+          <p:nvPr>
+            <p:ph idx="1"/>
+          </p:nvPr>
+        </p:nvSpPr>
+        <p:spPr>
+          <a:xfrm>
+            <a:off x="548640" y="1554480"/>
+            <a:ext cx="11064240" cy="4937760"/>
+          </a:xfrm>
+        </p:spPr>
+        <p:txBody>
+          <a:bodyPr wrap="square"/>
+          <a:lstStyle/>
+          <a:p>
+            <a:pPr marL="0" indent="0">
+              <a:spcAft>
+                <a:spcPts val="600"/>
+              </a:spcAft>
+              <a:buNone/>
+            </a:pPr>
+            <a:r>
+              <a:rPr sz="2000" b="0" lang="en-US">
+                <a:latin typeface="Arial"/>
+              </a:rPr>
+              <a:t>Checked on 29 October 2026.</a:t>
+            </a:r>
+          </a:p>
+          <a:p>
+            <a:pPr lvl="1">
+              <a:spcAft>
+                <a:spcPts val="600"/>
+              </a:spcAft>
+            </a:pPr>
+            <a:r>
+              <a:rPr sz="2000" b="0" lang="en-US">
+                <a:latin typeface="Arial"/>
+                <a:hlinkClick r:id="rId2"/>
+              </a:rPr>
+              <a:t>ADA Title II web rule, ada.gov</a:t>
+            </a:r>
+            <a:r>
+              <a:rPr sz="2000" b="0" lang="en-US">
+                <a:latin typeface="Arial"/>
+              </a:rPr>
+              <a:t>: state and local governments, public colleges and universities included, must meet WCAG 2.1 AA. An interim final rule of 20 April 2026 moved the compliance dates to 26 April 2027 for entities of 50,000 people or more and 26 April 2028 for smaller ones.</a:t>
+            </a:r>
+          </a:p>
+          <a:p>
+            <a:pPr lvl="1">
+              <a:spcAft>
+                <a:spcPts val="600"/>
+              </a:spcAft>
+            </a:pPr>
+            <a:r>
+              <a:rPr sz="2000" b="0" lang="en-US">
+                <a:latin typeface="Arial"/>
+                <a:hlinkClick r:id="rId3"/>
+              </a:rPr>
+              <a:t>WCAG 2.2</a:t>
+            </a:r>
+            <a:r>
+              <a:rPr sz="2000" b="0" lang="en-US">
+                <a:latin typeface="Arial"/>
+              </a:rPr>
+              <a:t>, the current W3C Recommendation, which includes everything in WCAG 2.1.</a:t>
+            </a:r>
+          </a:p>
+        </p:txBody>
+      </p:sp>
+    </p:spTree>
+  </p:cSld>
+  <p:clrMapOvr>
+    <a:masterClrMapping/>
+  </p:clrMapOvr>
+</p:sld>
+</file>
+
 <file path=ppt/slides/slide3.xml><?xml version="1.0" encoding="utf-8"?>
 <p:sld xmlns:a="http://schemas.openxmlformats.org/drawingml/2006/main" xmlns:p="http://schemas.openxmlformats.org/presentationml/2006/main" xmlns:r="http://schemas.openxmlformats.org/officeDocument/2006/relationships">
   <p:cSld>
@@ -6785,7 +6908,7 @@
               <a:rPr sz="1800" b="0" lang="en-US">
                 <a:latin typeface="Consolas"/>
               </a:rPr>
-              <a:t>description: Turns checker reports for a course into dated, prioritized, evidence-backed remediation log entries.</a:t>
+              <a:t>description: Turns checker reports for a course into dated, prioritized, evidence-backed remediation log entries. Use when you need a dated, defensible record of a course's barriers for Title II.</a:t>
             </a:r>
             <a:br/>
             <a:r>
